--- a/exports/Blockchain-and-Cryptocurrency-Slide-Deck.pptx
+++ b/exports/Blockchain-and-Cryptocurrency-Slide-Deck.pptx
@@ -3084,7 +3084,7 @@
     <p:bg>
       <p:bgPr>
         <a:solidFill>
-          <a:srgbClr val="060D1E"/>
+          <a:srgbClr val="0D2137"/>
         </a:solidFill>
         <a:effectLst/>
       </p:bgPr>
@@ -3105,13 +3105,13 @@
         <p:spPr>
           <a:xfrm>
             <a:off x="0" y="0"/>
-            <a:ext cx="12188952" cy="73152"/>
+            <a:ext cx="12188952" cy="64008"/>
           </a:xfrm>
           <a:prstGeom prst="rect">
             <a:avLst/>
           </a:prstGeom>
           <a:solidFill>
-            <a:srgbClr val="F59E0B"/>
+            <a:srgbClr val="F5A623"/>
           </a:solidFill>
           <a:ln>
             <a:noFill/>
@@ -3141,160 +3141,20 @@
       </p:sp>
       <p:sp>
         <p:nvSpPr>
-          <p:cNvPr id="3" name="TextBox 2"/>
-          <p:cNvSpPr txBox="1"/>
-          <p:nvPr/>
-        </p:nvSpPr>
-        <p:spPr>
-          <a:xfrm>
-            <a:off x="457200" y="182880"/>
-            <a:ext cx="4572000" cy="548640"/>
-          </a:xfrm>
-          <a:prstGeom prst="rect">
-            <a:avLst/>
-          </a:prstGeom>
-          <a:noFill/>
-        </p:spPr>
-        <p:txBody>
-          <a:bodyPr wrap="square">
-            <a:spAutoFit/>
-          </a:bodyPr>
-          <a:lstStyle/>
-          <a:p>
-            <a:pPr algn="l"/>
-            <a:r>
-              <a:rPr sz="1300" b="1" i="0">
-                <a:solidFill>
-                  <a:srgbClr val="F59E0B"/>
-                </a:solidFill>
-                <a:latin typeface="Calibri"/>
-              </a:rPr>
-              <a:t>MetaBridge Academy</a:t>
-            </a:r>
-          </a:p>
-        </p:txBody>
-      </p:sp>
-      <p:sp>
-        <p:nvSpPr>
-          <p:cNvPr id="4" name="TextBox 3"/>
-          <p:cNvSpPr txBox="1"/>
-          <p:nvPr/>
-        </p:nvSpPr>
-        <p:spPr>
-          <a:xfrm>
-            <a:off x="914400" y="1828800"/>
-            <a:ext cx="10360152" cy="1280160"/>
-          </a:xfrm>
-          <a:prstGeom prst="rect">
-            <a:avLst/>
-          </a:prstGeom>
-          <a:noFill/>
-        </p:spPr>
-        <p:txBody>
-          <a:bodyPr wrap="square">
-            <a:spAutoFit/>
-          </a:bodyPr>
-          <a:lstStyle/>
-          <a:p>
-            <a:pPr algn="ctr"/>
-            <a:r>
-              <a:rPr sz="4000" b="1" i="0">
-                <a:solidFill>
-                  <a:srgbClr val="FFFFFF"/>
-                </a:solidFill>
-                <a:latin typeface="Calibri"/>
-              </a:rPr>
-              <a:t>BLOCKCHAIN &amp; CRYPTOCURRENCY</a:t>
-            </a:r>
-          </a:p>
-        </p:txBody>
-      </p:sp>
-      <p:sp>
-        <p:nvSpPr>
-          <p:cNvPr id="5" name="TextBox 4"/>
-          <p:cNvSpPr txBox="1"/>
-          <p:nvPr/>
-        </p:nvSpPr>
-        <p:spPr>
-          <a:xfrm>
-            <a:off x="914400" y="3108960"/>
-            <a:ext cx="10360152" cy="640080"/>
-          </a:xfrm>
-          <a:prstGeom prst="rect">
-            <a:avLst/>
-          </a:prstGeom>
-          <a:noFill/>
-        </p:spPr>
-        <p:txBody>
-          <a:bodyPr wrap="square">
-            <a:spAutoFit/>
-          </a:bodyPr>
-          <a:lstStyle/>
-          <a:p>
-            <a:pPr algn="ctr"/>
-            <a:r>
-              <a:rPr sz="2200" b="0" i="0">
-                <a:solidFill>
-                  <a:srgbClr val="F59E0B"/>
-                </a:solidFill>
-                <a:latin typeface="Calibri"/>
-              </a:rPr>
-              <a:t>SLIDE DECK</a:t>
-            </a:r>
-          </a:p>
-        </p:txBody>
-      </p:sp>
-      <p:sp>
-        <p:nvSpPr>
-          <p:cNvPr id="6" name="TextBox 5"/>
-          <p:cNvSpPr txBox="1"/>
-          <p:nvPr/>
-        </p:nvSpPr>
-        <p:spPr>
-          <a:xfrm>
-            <a:off x="914400" y="3840480"/>
-            <a:ext cx="10360152" cy="457200"/>
-          </a:xfrm>
-          <a:prstGeom prst="rect">
-            <a:avLst/>
-          </a:prstGeom>
-          <a:noFill/>
-        </p:spPr>
-        <p:txBody>
-          <a:bodyPr wrap="square">
-            <a:spAutoFit/>
-          </a:bodyPr>
-          <a:lstStyle/>
-          <a:p>
-            <a:pPr algn="ctr"/>
-            <a:r>
-              <a:rPr sz="1400" b="0" i="0">
-                <a:solidFill>
-                  <a:srgbClr val="94A3B8"/>
-                </a:solidFill>
-                <a:latin typeface="Calibri"/>
-              </a:rPr>
-              <a:t>Nigeria's Premier Blockchain &amp; Technology Academy</a:t>
-            </a:r>
-          </a:p>
-        </p:txBody>
-      </p:sp>
-      <p:sp>
-        <p:nvSpPr>
-          <p:cNvPr id="7" name="Rectangle 6"/>
+          <p:cNvPr id="3" name="Rectangle 2"/>
           <p:cNvSpPr/>
           <p:nvPr/>
         </p:nvSpPr>
         <p:spPr>
           <a:xfrm>
-            <a:off x="0" y="6675120"/>
-            <a:ext cx="12188952" cy="182880"/>
+            <a:off x="0" y="64008"/>
+            <a:ext cx="4297680" cy="6793992"/>
           </a:xfrm>
           <a:prstGeom prst="rect">
             <a:avLst/>
           </a:prstGeom>
           <a:solidFill>
-            <a:srgbClr val="F59E0B"/>
+            <a:srgbClr val="0A1929"/>
           </a:solidFill>
           <a:ln>
             <a:noFill/>
@@ -3319,6 +3179,970 @@
           <a:lstStyle/>
           <a:p>
             <a:pPr algn="ctr"/>
+          </a:p>
+        </p:txBody>
+      </p:sp>
+      <p:sp>
+        <p:nvSpPr>
+          <p:cNvPr id="4" name="Rectangle 3"/>
+          <p:cNvSpPr/>
+          <p:nvPr/>
+        </p:nvSpPr>
+        <p:spPr>
+          <a:xfrm>
+            <a:off x="4297680" y="64008"/>
+            <a:ext cx="54864" cy="6793992"/>
+          </a:xfrm>
+          <a:prstGeom prst="rect">
+            <a:avLst/>
+          </a:prstGeom>
+          <a:solidFill>
+            <a:srgbClr val="F5A623"/>
+          </a:solidFill>
+          <a:ln>
+            <a:noFill/>
+          </a:ln>
+        </p:spPr>
+        <p:style>
+          <a:lnRef idx="1">
+            <a:schemeClr val="accent1"/>
+          </a:lnRef>
+          <a:fillRef idx="3">
+            <a:schemeClr val="accent1"/>
+          </a:fillRef>
+          <a:effectRef idx="2">
+            <a:schemeClr val="accent1"/>
+          </a:effectRef>
+          <a:fontRef idx="minor">
+            <a:schemeClr val="lt1"/>
+          </a:fontRef>
+        </p:style>
+        <p:txBody>
+          <a:bodyPr rtlCol="0" anchor="ctr"/>
+          <a:lstStyle/>
+          <a:p>
+            <a:pPr algn="ctr"/>
+          </a:p>
+        </p:txBody>
+      </p:sp>
+      <p:sp>
+        <p:nvSpPr>
+          <p:cNvPr id="5" name="TextBox 4"/>
+          <p:cNvSpPr txBox="1"/>
+          <p:nvPr/>
+        </p:nvSpPr>
+        <p:spPr>
+          <a:xfrm>
+            <a:off x="274320" y="365760"/>
+            <a:ext cx="3840480" cy="502920"/>
+          </a:xfrm>
+          <a:prstGeom prst="rect">
+            <a:avLst/>
+          </a:prstGeom>
+          <a:noFill/>
+        </p:spPr>
+        <p:txBody>
+          <a:bodyPr wrap="square">
+            <a:spAutoFit/>
+          </a:bodyPr>
+          <a:lstStyle/>
+          <a:p>
+            <a:pPr algn="l"/>
+            <a:r>
+              <a:rPr sz="2800" b="1" i="0">
+                <a:solidFill>
+                  <a:srgbClr val="F5A623"/>
+                </a:solidFill>
+                <a:latin typeface="Calibri"/>
+              </a:rPr>
+              <a:t>MetaBridge</a:t>
+            </a:r>
+          </a:p>
+        </p:txBody>
+      </p:sp>
+      <p:sp>
+        <p:nvSpPr>
+          <p:cNvPr id="6" name="TextBox 5"/>
+          <p:cNvSpPr txBox="1"/>
+          <p:nvPr/>
+        </p:nvSpPr>
+        <p:spPr>
+          <a:xfrm>
+            <a:off x="274320" y="822960"/>
+            <a:ext cx="3840480" cy="457200"/>
+          </a:xfrm>
+          <a:prstGeom prst="rect">
+            <a:avLst/>
+          </a:prstGeom>
+          <a:noFill/>
+        </p:spPr>
+        <p:txBody>
+          <a:bodyPr wrap="square">
+            <a:spAutoFit/>
+          </a:bodyPr>
+          <a:lstStyle/>
+          <a:p>
+            <a:pPr algn="l"/>
+            <a:r>
+              <a:rPr sz="2800" b="0" i="0">
+                <a:solidFill>
+                  <a:srgbClr val="FFFFFF"/>
+                </a:solidFill>
+                <a:latin typeface="Calibri"/>
+              </a:rPr>
+              <a:t>Academy</a:t>
+            </a:r>
+          </a:p>
+        </p:txBody>
+      </p:sp>
+      <p:sp>
+        <p:nvSpPr>
+          <p:cNvPr id="7" name="TextBox 6"/>
+          <p:cNvSpPr txBox="1"/>
+          <p:nvPr/>
+        </p:nvSpPr>
+        <p:spPr>
+          <a:xfrm>
+            <a:off x="274320" y="1828800"/>
+            <a:ext cx="3840480" cy="1645920"/>
+          </a:xfrm>
+          <a:prstGeom prst="rect">
+            <a:avLst/>
+          </a:prstGeom>
+          <a:noFill/>
+        </p:spPr>
+        <p:txBody>
+          <a:bodyPr wrap="square">
+            <a:spAutoFit/>
+          </a:bodyPr>
+          <a:lstStyle/>
+          <a:p>
+            <a:pPr algn="l"/>
+            <a:r>
+              <a:rPr sz="2600" b="1" i="0">
+                <a:solidFill>
+                  <a:srgbClr val="FFFFFF"/>
+                </a:solidFill>
+                <a:latin typeface="Calibri"/>
+              </a:rPr>
+              <a:t>Blockchain &amp; Cryptocurrency</a:t>
+            </a:r>
+          </a:p>
+        </p:txBody>
+      </p:sp>
+      <p:sp>
+        <p:nvSpPr>
+          <p:cNvPr id="8" name="TextBox 7"/>
+          <p:cNvSpPr txBox="1"/>
+          <p:nvPr/>
+        </p:nvSpPr>
+        <p:spPr>
+          <a:xfrm>
+            <a:off x="274320" y="3566160"/>
+            <a:ext cx="3840480" cy="822960"/>
+          </a:xfrm>
+          <a:prstGeom prst="rect">
+            <a:avLst/>
+          </a:prstGeom>
+          <a:noFill/>
+        </p:spPr>
+        <p:txBody>
+          <a:bodyPr wrap="square">
+            <a:spAutoFit/>
+          </a:bodyPr>
+          <a:lstStyle/>
+          <a:p>
+            <a:pPr algn="l"/>
+            <a:r>
+              <a:rPr sz="1400" b="0" i="0">
+                <a:solidFill>
+                  <a:srgbClr val="8BA5BE"/>
+                </a:solidFill>
+                <a:latin typeface="Calibri"/>
+              </a:rPr>
+              <a:t>Comprehensive Course
+Slide Deck</a:t>
+            </a:r>
+          </a:p>
+        </p:txBody>
+      </p:sp>
+      <p:sp>
+        <p:nvSpPr>
+          <p:cNvPr id="9" name="Rectangle 8"/>
+          <p:cNvSpPr/>
+          <p:nvPr/>
+        </p:nvSpPr>
+        <p:spPr>
+          <a:xfrm>
+            <a:off x="0" y="6565392"/>
+            <a:ext cx="12188952" cy="292608"/>
+          </a:xfrm>
+          <a:prstGeom prst="rect">
+            <a:avLst/>
+          </a:prstGeom>
+          <a:solidFill>
+            <a:srgbClr val="0A1929"/>
+          </a:solidFill>
+          <a:ln>
+            <a:noFill/>
+          </a:ln>
+        </p:spPr>
+        <p:style>
+          <a:lnRef idx="1">
+            <a:schemeClr val="accent1"/>
+          </a:lnRef>
+          <a:fillRef idx="3">
+            <a:schemeClr val="accent1"/>
+          </a:fillRef>
+          <a:effectRef idx="2">
+            <a:schemeClr val="accent1"/>
+          </a:effectRef>
+          <a:fontRef idx="minor">
+            <a:schemeClr val="lt1"/>
+          </a:fontRef>
+        </p:style>
+        <p:txBody>
+          <a:bodyPr rtlCol="0" anchor="ctr"/>
+          <a:lstStyle/>
+          <a:p>
+            <a:pPr algn="ctr"/>
+          </a:p>
+        </p:txBody>
+      </p:sp>
+      <p:sp>
+        <p:nvSpPr>
+          <p:cNvPr id="10" name="TextBox 9"/>
+          <p:cNvSpPr txBox="1"/>
+          <p:nvPr/>
+        </p:nvSpPr>
+        <p:spPr>
+          <a:xfrm>
+            <a:off x="4535424" y="6565392"/>
+            <a:ext cx="7562088" cy="292608"/>
+          </a:xfrm>
+          <a:prstGeom prst="rect">
+            <a:avLst/>
+          </a:prstGeom>
+          <a:noFill/>
+        </p:spPr>
+        <p:txBody>
+          <a:bodyPr wrap="square">
+            <a:spAutoFit/>
+          </a:bodyPr>
+          <a:lstStyle/>
+          <a:p>
+            <a:pPr algn="ctr"/>
+            <a:r>
+              <a:rPr sz="800" b="0" i="0">
+                <a:solidFill>
+                  <a:srgbClr val="8BA5BE"/>
+                </a:solidFill>
+                <a:latin typeface="Calibri"/>
+              </a:rPr>
+              <a:t>Cybersecurity  |  Data Analytics  |  AI &amp; Prompt Engineering  |  Blockchain &amp; Cryptocurrency</a:t>
+            </a:r>
+          </a:p>
+        </p:txBody>
+      </p:sp>
+      <p:sp>
+        <p:nvSpPr>
+          <p:cNvPr id="11" name="Rectangle 10"/>
+          <p:cNvSpPr/>
+          <p:nvPr/>
+        </p:nvSpPr>
+        <p:spPr>
+          <a:xfrm>
+            <a:off x="4718304" y="1097280"/>
+            <a:ext cx="3415284" cy="1417320"/>
+          </a:xfrm>
+          <a:prstGeom prst="rect">
+            <a:avLst/>
+          </a:prstGeom>
+          <a:solidFill>
+            <a:srgbClr val="122236"/>
+          </a:solidFill>
+          <a:ln>
+            <a:noFill/>
+          </a:ln>
+        </p:spPr>
+        <p:style>
+          <a:lnRef idx="1">
+            <a:schemeClr val="accent1"/>
+          </a:lnRef>
+          <a:fillRef idx="3">
+            <a:schemeClr val="accent1"/>
+          </a:fillRef>
+          <a:effectRef idx="2">
+            <a:schemeClr val="accent1"/>
+          </a:effectRef>
+          <a:fontRef idx="minor">
+            <a:schemeClr val="lt1"/>
+          </a:fontRef>
+        </p:style>
+        <p:txBody>
+          <a:bodyPr rtlCol="0" anchor="ctr"/>
+          <a:lstStyle/>
+          <a:p>
+            <a:pPr algn="ctr"/>
+          </a:p>
+        </p:txBody>
+      </p:sp>
+      <p:sp>
+        <p:nvSpPr>
+          <p:cNvPr id="12" name="Rectangle 11"/>
+          <p:cNvSpPr/>
+          <p:nvPr/>
+        </p:nvSpPr>
+        <p:spPr>
+          <a:xfrm>
+            <a:off x="4718304" y="1097280"/>
+            <a:ext cx="50292" cy="1417320"/>
+          </a:xfrm>
+          <a:prstGeom prst="rect">
+            <a:avLst/>
+          </a:prstGeom>
+          <a:solidFill>
+            <a:srgbClr val="F5A623"/>
+          </a:solidFill>
+          <a:ln>
+            <a:noFill/>
+          </a:ln>
+        </p:spPr>
+        <p:style>
+          <a:lnRef idx="1">
+            <a:schemeClr val="accent1"/>
+          </a:lnRef>
+          <a:fillRef idx="3">
+            <a:schemeClr val="accent1"/>
+          </a:fillRef>
+          <a:effectRef idx="2">
+            <a:schemeClr val="accent1"/>
+          </a:effectRef>
+          <a:fontRef idx="minor">
+            <a:schemeClr val="lt1"/>
+          </a:fontRef>
+        </p:style>
+        <p:txBody>
+          <a:bodyPr rtlCol="0" anchor="ctr"/>
+          <a:lstStyle/>
+          <a:p>
+            <a:pPr algn="ctr"/>
+          </a:p>
+        </p:txBody>
+      </p:sp>
+      <p:sp>
+        <p:nvSpPr>
+          <p:cNvPr id="13" name="TextBox 12"/>
+          <p:cNvSpPr txBox="1"/>
+          <p:nvPr/>
+        </p:nvSpPr>
+        <p:spPr>
+          <a:xfrm>
+            <a:off x="4855464" y="1234440"/>
+            <a:ext cx="3232404" cy="640080"/>
+          </a:xfrm>
+          <a:prstGeom prst="rect">
+            <a:avLst/>
+          </a:prstGeom>
+          <a:noFill/>
+        </p:spPr>
+        <p:txBody>
+          <a:bodyPr wrap="square">
+            <a:spAutoFit/>
+          </a:bodyPr>
+          <a:lstStyle/>
+          <a:p>
+            <a:pPr algn="l"/>
+            <a:r>
+              <a:rPr sz="2000" b="1" i="0">
+                <a:solidFill>
+                  <a:srgbClr val="F5A623"/>
+                </a:solidFill>
+                <a:latin typeface="Calibri"/>
+              </a:rPr>
+              <a:t>Blockchain</a:t>
+            </a:r>
+          </a:p>
+        </p:txBody>
+      </p:sp>
+      <p:sp>
+        <p:nvSpPr>
+          <p:cNvPr id="14" name="TextBox 13"/>
+          <p:cNvSpPr txBox="1"/>
+          <p:nvPr/>
+        </p:nvSpPr>
+        <p:spPr>
+          <a:xfrm>
+            <a:off x="4855464" y="1874520"/>
+            <a:ext cx="3232404" cy="457200"/>
+          </a:xfrm>
+          <a:prstGeom prst="rect">
+            <a:avLst/>
+          </a:prstGeom>
+          <a:noFill/>
+        </p:spPr>
+        <p:txBody>
+          <a:bodyPr wrap="square">
+            <a:spAutoFit/>
+          </a:bodyPr>
+          <a:lstStyle/>
+          <a:p>
+            <a:pPr algn="l"/>
+            <a:r>
+              <a:rPr sz="1100" b="0" i="0">
+                <a:solidFill>
+                  <a:srgbClr val="F0F4F8"/>
+                </a:solidFill>
+                <a:latin typeface="Calibri"/>
+              </a:rPr>
+              <a:t>Course</a:t>
+            </a:r>
+          </a:p>
+        </p:txBody>
+      </p:sp>
+      <p:sp>
+        <p:nvSpPr>
+          <p:cNvPr id="15" name="Rectangle 14"/>
+          <p:cNvSpPr/>
+          <p:nvPr/>
+        </p:nvSpPr>
+        <p:spPr>
+          <a:xfrm>
+            <a:off x="8407908" y="1097280"/>
+            <a:ext cx="3415284" cy="1417320"/>
+          </a:xfrm>
+          <a:prstGeom prst="rect">
+            <a:avLst/>
+          </a:prstGeom>
+          <a:solidFill>
+            <a:srgbClr val="122236"/>
+          </a:solidFill>
+          <a:ln>
+            <a:noFill/>
+          </a:ln>
+        </p:spPr>
+        <p:style>
+          <a:lnRef idx="1">
+            <a:schemeClr val="accent1"/>
+          </a:lnRef>
+          <a:fillRef idx="3">
+            <a:schemeClr val="accent1"/>
+          </a:fillRef>
+          <a:effectRef idx="2">
+            <a:schemeClr val="accent1"/>
+          </a:effectRef>
+          <a:fontRef idx="minor">
+            <a:schemeClr val="lt1"/>
+          </a:fontRef>
+        </p:style>
+        <p:txBody>
+          <a:bodyPr rtlCol="0" anchor="ctr"/>
+          <a:lstStyle/>
+          <a:p>
+            <a:pPr algn="ctr"/>
+          </a:p>
+        </p:txBody>
+      </p:sp>
+      <p:sp>
+        <p:nvSpPr>
+          <p:cNvPr id="16" name="Rectangle 15"/>
+          <p:cNvSpPr/>
+          <p:nvPr/>
+        </p:nvSpPr>
+        <p:spPr>
+          <a:xfrm>
+            <a:off x="8407908" y="1097280"/>
+            <a:ext cx="50292" cy="1417320"/>
+          </a:xfrm>
+          <a:prstGeom prst="rect">
+            <a:avLst/>
+          </a:prstGeom>
+          <a:solidFill>
+            <a:srgbClr val="00C2D4"/>
+          </a:solidFill>
+          <a:ln>
+            <a:noFill/>
+          </a:ln>
+        </p:spPr>
+        <p:style>
+          <a:lnRef idx="1">
+            <a:schemeClr val="accent1"/>
+          </a:lnRef>
+          <a:fillRef idx="3">
+            <a:schemeClr val="accent1"/>
+          </a:fillRef>
+          <a:effectRef idx="2">
+            <a:schemeClr val="accent1"/>
+          </a:effectRef>
+          <a:fontRef idx="minor">
+            <a:schemeClr val="lt1"/>
+          </a:fontRef>
+        </p:style>
+        <p:txBody>
+          <a:bodyPr rtlCol="0" anchor="ctr"/>
+          <a:lstStyle/>
+          <a:p>
+            <a:pPr algn="ctr"/>
+          </a:p>
+        </p:txBody>
+      </p:sp>
+      <p:sp>
+        <p:nvSpPr>
+          <p:cNvPr id="17" name="TextBox 16"/>
+          <p:cNvSpPr txBox="1"/>
+          <p:nvPr/>
+        </p:nvSpPr>
+        <p:spPr>
+          <a:xfrm>
+            <a:off x="8545068" y="1234440"/>
+            <a:ext cx="3232404" cy="640080"/>
+          </a:xfrm>
+          <a:prstGeom prst="rect">
+            <a:avLst/>
+          </a:prstGeom>
+          <a:noFill/>
+        </p:spPr>
+        <p:txBody>
+          <a:bodyPr wrap="square">
+            <a:spAutoFit/>
+          </a:bodyPr>
+          <a:lstStyle/>
+          <a:p>
+            <a:pPr algn="l"/>
+            <a:r>
+              <a:rPr sz="2000" b="1" i="0">
+                <a:solidFill>
+                  <a:srgbClr val="00C2D4"/>
+                </a:solidFill>
+                <a:latin typeface="Calibri"/>
+              </a:rPr>
+              <a:t>12 Modules</a:t>
+            </a:r>
+          </a:p>
+        </p:txBody>
+      </p:sp>
+      <p:sp>
+        <p:nvSpPr>
+          <p:cNvPr id="18" name="TextBox 17"/>
+          <p:cNvSpPr txBox="1"/>
+          <p:nvPr/>
+        </p:nvSpPr>
+        <p:spPr>
+          <a:xfrm>
+            <a:off x="8545068" y="1874520"/>
+            <a:ext cx="3232404" cy="457200"/>
+          </a:xfrm>
+          <a:prstGeom prst="rect">
+            <a:avLst/>
+          </a:prstGeom>
+          <a:noFill/>
+        </p:spPr>
+        <p:txBody>
+          <a:bodyPr wrap="square">
+            <a:spAutoFit/>
+          </a:bodyPr>
+          <a:lstStyle/>
+          <a:p>
+            <a:pPr algn="l"/>
+            <a:r>
+              <a:rPr sz="1100" b="0" i="0">
+                <a:solidFill>
+                  <a:srgbClr val="F0F4F8"/>
+                </a:solidFill>
+                <a:latin typeface="Calibri"/>
+              </a:rPr>
+              <a:t>of content</a:t>
+            </a:r>
+          </a:p>
+        </p:txBody>
+      </p:sp>
+      <p:sp>
+        <p:nvSpPr>
+          <p:cNvPr id="19" name="Rectangle 18"/>
+          <p:cNvSpPr/>
+          <p:nvPr/>
+        </p:nvSpPr>
+        <p:spPr>
+          <a:xfrm>
+            <a:off x="4718304" y="2743200"/>
+            <a:ext cx="3415284" cy="1417320"/>
+          </a:xfrm>
+          <a:prstGeom prst="rect">
+            <a:avLst/>
+          </a:prstGeom>
+          <a:solidFill>
+            <a:srgbClr val="122236"/>
+          </a:solidFill>
+          <a:ln>
+            <a:noFill/>
+          </a:ln>
+        </p:spPr>
+        <p:style>
+          <a:lnRef idx="1">
+            <a:schemeClr val="accent1"/>
+          </a:lnRef>
+          <a:fillRef idx="3">
+            <a:schemeClr val="accent1"/>
+          </a:fillRef>
+          <a:effectRef idx="2">
+            <a:schemeClr val="accent1"/>
+          </a:effectRef>
+          <a:fontRef idx="minor">
+            <a:schemeClr val="lt1"/>
+          </a:fontRef>
+        </p:style>
+        <p:txBody>
+          <a:bodyPr rtlCol="0" anchor="ctr"/>
+          <a:lstStyle/>
+          <a:p>
+            <a:pPr algn="ctr"/>
+          </a:p>
+        </p:txBody>
+      </p:sp>
+      <p:sp>
+        <p:nvSpPr>
+          <p:cNvPr id="20" name="Rectangle 19"/>
+          <p:cNvSpPr/>
+          <p:nvPr/>
+        </p:nvSpPr>
+        <p:spPr>
+          <a:xfrm>
+            <a:off x="4718304" y="2743200"/>
+            <a:ext cx="50292" cy="1417320"/>
+          </a:xfrm>
+          <a:prstGeom prst="rect">
+            <a:avLst/>
+          </a:prstGeom>
+          <a:solidFill>
+            <a:srgbClr val="00B894"/>
+          </a:solidFill>
+          <a:ln>
+            <a:noFill/>
+          </a:ln>
+        </p:spPr>
+        <p:style>
+          <a:lnRef idx="1">
+            <a:schemeClr val="accent1"/>
+          </a:lnRef>
+          <a:fillRef idx="3">
+            <a:schemeClr val="accent1"/>
+          </a:fillRef>
+          <a:effectRef idx="2">
+            <a:schemeClr val="accent1"/>
+          </a:effectRef>
+          <a:fontRef idx="minor">
+            <a:schemeClr val="lt1"/>
+          </a:fontRef>
+        </p:style>
+        <p:txBody>
+          <a:bodyPr rtlCol="0" anchor="ctr"/>
+          <a:lstStyle/>
+          <a:p>
+            <a:pPr algn="ctr"/>
+          </a:p>
+        </p:txBody>
+      </p:sp>
+      <p:sp>
+        <p:nvSpPr>
+          <p:cNvPr id="21" name="TextBox 20"/>
+          <p:cNvSpPr txBox="1"/>
+          <p:nvPr/>
+        </p:nvSpPr>
+        <p:spPr>
+          <a:xfrm>
+            <a:off x="4855464" y="2880360"/>
+            <a:ext cx="3232404" cy="640080"/>
+          </a:xfrm>
+          <a:prstGeom prst="rect">
+            <a:avLst/>
+          </a:prstGeom>
+          <a:noFill/>
+        </p:spPr>
+        <p:txBody>
+          <a:bodyPr wrap="square">
+            <a:spAutoFit/>
+          </a:bodyPr>
+          <a:lstStyle/>
+          <a:p>
+            <a:pPr algn="l"/>
+            <a:r>
+              <a:rPr sz="2000" b="1" i="0">
+                <a:solidFill>
+                  <a:srgbClr val="00B894"/>
+                </a:solidFill>
+                <a:latin typeface="Calibri"/>
+              </a:rPr>
+              <a:t>72+ Hours</a:t>
+            </a:r>
+          </a:p>
+        </p:txBody>
+      </p:sp>
+      <p:sp>
+        <p:nvSpPr>
+          <p:cNvPr id="22" name="TextBox 21"/>
+          <p:cNvSpPr txBox="1"/>
+          <p:nvPr/>
+        </p:nvSpPr>
+        <p:spPr>
+          <a:xfrm>
+            <a:off x="4855464" y="3520440"/>
+            <a:ext cx="3232404" cy="457200"/>
+          </a:xfrm>
+          <a:prstGeom prst="rect">
+            <a:avLst/>
+          </a:prstGeom>
+          <a:noFill/>
+        </p:spPr>
+        <p:txBody>
+          <a:bodyPr wrap="square">
+            <a:spAutoFit/>
+          </a:bodyPr>
+          <a:lstStyle/>
+          <a:p>
+            <a:pPr algn="l"/>
+            <a:r>
+              <a:rPr sz="1100" b="0" i="0">
+                <a:solidFill>
+                  <a:srgbClr val="F0F4F8"/>
+                </a:solidFill>
+                <a:latin typeface="Calibri"/>
+              </a:rPr>
+              <a:t>of training</a:t>
+            </a:r>
+          </a:p>
+        </p:txBody>
+      </p:sp>
+      <p:sp>
+        <p:nvSpPr>
+          <p:cNvPr id="23" name="Rectangle 22"/>
+          <p:cNvSpPr/>
+          <p:nvPr/>
+        </p:nvSpPr>
+        <p:spPr>
+          <a:xfrm>
+            <a:off x="8407908" y="2743200"/>
+            <a:ext cx="3415284" cy="1417320"/>
+          </a:xfrm>
+          <a:prstGeom prst="rect">
+            <a:avLst/>
+          </a:prstGeom>
+          <a:solidFill>
+            <a:srgbClr val="122236"/>
+          </a:solidFill>
+          <a:ln>
+            <a:noFill/>
+          </a:ln>
+        </p:spPr>
+        <p:style>
+          <a:lnRef idx="1">
+            <a:schemeClr val="accent1"/>
+          </a:lnRef>
+          <a:fillRef idx="3">
+            <a:schemeClr val="accent1"/>
+          </a:fillRef>
+          <a:effectRef idx="2">
+            <a:schemeClr val="accent1"/>
+          </a:effectRef>
+          <a:fontRef idx="minor">
+            <a:schemeClr val="lt1"/>
+          </a:fontRef>
+        </p:style>
+        <p:txBody>
+          <a:bodyPr rtlCol="0" anchor="ctr"/>
+          <a:lstStyle/>
+          <a:p>
+            <a:pPr algn="ctr"/>
+          </a:p>
+        </p:txBody>
+      </p:sp>
+      <p:sp>
+        <p:nvSpPr>
+          <p:cNvPr id="24" name="Rectangle 23"/>
+          <p:cNvSpPr/>
+          <p:nvPr/>
+        </p:nvSpPr>
+        <p:spPr>
+          <a:xfrm>
+            <a:off x="8407908" y="2743200"/>
+            <a:ext cx="50292" cy="1417320"/>
+          </a:xfrm>
+          <a:prstGeom prst="rect">
+            <a:avLst/>
+          </a:prstGeom>
+          <a:solidFill>
+            <a:srgbClr val="8BA5BE"/>
+          </a:solidFill>
+          <a:ln>
+            <a:noFill/>
+          </a:ln>
+        </p:spPr>
+        <p:style>
+          <a:lnRef idx="1">
+            <a:schemeClr val="accent1"/>
+          </a:lnRef>
+          <a:fillRef idx="3">
+            <a:schemeClr val="accent1"/>
+          </a:fillRef>
+          <a:effectRef idx="2">
+            <a:schemeClr val="accent1"/>
+          </a:effectRef>
+          <a:fontRef idx="minor">
+            <a:schemeClr val="lt1"/>
+          </a:fontRef>
+        </p:style>
+        <p:txBody>
+          <a:bodyPr rtlCol="0" anchor="ctr"/>
+          <a:lstStyle/>
+          <a:p>
+            <a:pPr algn="ctr"/>
+          </a:p>
+        </p:txBody>
+      </p:sp>
+      <p:sp>
+        <p:nvSpPr>
+          <p:cNvPr id="25" name="TextBox 24"/>
+          <p:cNvSpPr txBox="1"/>
+          <p:nvPr/>
+        </p:nvSpPr>
+        <p:spPr>
+          <a:xfrm>
+            <a:off x="8545068" y="2880360"/>
+            <a:ext cx="3232404" cy="640080"/>
+          </a:xfrm>
+          <a:prstGeom prst="rect">
+            <a:avLst/>
+          </a:prstGeom>
+          <a:noFill/>
+        </p:spPr>
+        <p:txBody>
+          <a:bodyPr wrap="square">
+            <a:spAutoFit/>
+          </a:bodyPr>
+          <a:lstStyle/>
+          <a:p>
+            <a:pPr algn="l"/>
+            <a:r>
+              <a:rPr sz="2000" b="1" i="0">
+                <a:solidFill>
+                  <a:srgbClr val="8BA5BE"/>
+                </a:solidFill>
+                <a:latin typeface="Calibri"/>
+              </a:rPr>
+              <a:t>Blockchain</a:t>
+            </a:r>
+          </a:p>
+        </p:txBody>
+      </p:sp>
+      <p:sp>
+        <p:nvSpPr>
+          <p:cNvPr id="26" name="TextBox 25"/>
+          <p:cNvSpPr txBox="1"/>
+          <p:nvPr/>
+        </p:nvSpPr>
+        <p:spPr>
+          <a:xfrm>
+            <a:off x="8545068" y="3520440"/>
+            <a:ext cx="3232404" cy="457200"/>
+          </a:xfrm>
+          <a:prstGeom prst="rect">
+            <a:avLst/>
+          </a:prstGeom>
+          <a:noFill/>
+        </p:spPr>
+        <p:txBody>
+          <a:bodyPr wrap="square">
+            <a:spAutoFit/>
+          </a:bodyPr>
+          <a:lstStyle/>
+          <a:p>
+            <a:pPr algn="l"/>
+            <a:r>
+              <a:rPr sz="1100" b="0" i="0">
+                <a:solidFill>
+                  <a:srgbClr val="F0F4F8"/>
+                </a:solidFill>
+                <a:latin typeface="Calibri"/>
+              </a:rPr>
+              <a:t>Certificate</a:t>
+            </a:r>
+          </a:p>
+        </p:txBody>
+      </p:sp>
+      <p:sp>
+        <p:nvSpPr>
+          <p:cNvPr id="27" name="Rectangle 26"/>
+          <p:cNvSpPr/>
+          <p:nvPr/>
+        </p:nvSpPr>
+        <p:spPr>
+          <a:xfrm>
+            <a:off x="4352544" y="6062472"/>
+            <a:ext cx="7836408" cy="457200"/>
+          </a:xfrm>
+          <a:prstGeom prst="rect">
+            <a:avLst/>
+          </a:prstGeom>
+          <a:solidFill>
+            <a:srgbClr val="122236"/>
+          </a:solidFill>
+          <a:ln>
+            <a:noFill/>
+          </a:ln>
+        </p:spPr>
+        <p:style>
+          <a:lnRef idx="1">
+            <a:schemeClr val="accent1"/>
+          </a:lnRef>
+          <a:fillRef idx="3">
+            <a:schemeClr val="accent1"/>
+          </a:fillRef>
+          <a:effectRef idx="2">
+            <a:schemeClr val="accent1"/>
+          </a:effectRef>
+          <a:fontRef idx="minor">
+            <a:schemeClr val="lt1"/>
+          </a:fontRef>
+        </p:style>
+        <p:txBody>
+          <a:bodyPr rtlCol="0" anchor="ctr"/>
+          <a:lstStyle/>
+          <a:p>
+            <a:pPr algn="ctr"/>
+          </a:p>
+        </p:txBody>
+      </p:sp>
+      <p:sp>
+        <p:nvSpPr>
+          <p:cNvPr id="28" name="TextBox 27"/>
+          <p:cNvSpPr txBox="1"/>
+          <p:nvPr/>
+        </p:nvSpPr>
+        <p:spPr>
+          <a:xfrm>
+            <a:off x="4535424" y="6062472"/>
+            <a:ext cx="7470648" cy="457200"/>
+          </a:xfrm>
+          <a:prstGeom prst="rect">
+            <a:avLst/>
+          </a:prstGeom>
+          <a:noFill/>
+        </p:spPr>
+        <p:txBody>
+          <a:bodyPr wrap="square">
+            <a:spAutoFit/>
+          </a:bodyPr>
+          <a:lstStyle/>
+          <a:p>
+            <a:pPr algn="ctr"/>
+            <a:r>
+              <a:rPr sz="950" b="0" i="0">
+                <a:solidFill>
+                  <a:srgbClr val="8BA5BE"/>
+                </a:solidFill>
+                <a:latin typeface="Calibri"/>
+              </a:rPr>
+              <a:t>12 Modules  ·  72+ Hours  ·  Hands-On Labs  ·  CompTIA S+ Aligned  ·  Blockchain Certificate</a:t>
+            </a:r>
           </a:p>
         </p:txBody>
       </p:sp>
